--- a/dist/초6/수학/원과자료/초6_수학_원과자료_03_띠그래프와원그래프_학생용.pptx
+++ b/dist/초6/수학/원과자료/초6_수학_원과자료_03_띠그래프와원그래프_학생용.pptx
@@ -119,13 +119,13 @@
   <p:extLst>
     <p:ext uri="{521415D9-36F7-43E2-AB2F-B90AF26B5E84}">
       <p14:sectionLst xmlns:p14="http://schemas.microsoft.com/office/powerpoint/2010/main">
-        <p14:section name="도입" id="{1db07596-2b0f-becf-d254-ed41dd65798b}">
+        <p14:section name="도입" id="{26fe8887-6b8a-3dba-9106-1b883fdc0f95}">
           <p14:sldIdLst>
             <p14:sldId id="256"/>
             <p14:sldId id="257"/>
           </p14:sldIdLst>
         </p14:section>
-        <p14:section name="개념" id="{33b49d02-1beb-5ded-7ac1-2d89f6b26c9d}">
+        <p14:section name="개념" id="{763a3a0a-dcbe-b42d-b705-d2c8e4c93276}">
           <p14:sldIdLst>
             <p14:sldId id="258"/>
             <p14:sldId id="259"/>
@@ -133,31 +133,31 @@
             <p14:sldId id="263"/>
           </p14:sldIdLst>
         </p14:section>
-        <p14:section name="연습" id="{345a6358-05d4-14f2-1c71-e87e6ed1ab15}">
+        <p14:section name="연습" id="{68c1a1ee-3524-8ea9-a199-bf3421747e25}">
           <p14:sldIdLst>
             <p14:sldId id="260"/>
             <p14:sldId id="261"/>
             <p14:sldId id="264"/>
           </p14:sldIdLst>
         </p14:section>
-        <p14:section name="개념" id="{5036cf77-6785-7efe-b5a5-deb7e9ef5b8d}">
+        <p14:section name="개념" id="{4b174ac2-e9f0-9e94-2fea-8fb9db390779}">
           <p14:sldIdLst/>
         </p14:section>
-        <p14:section name="연습" id="{815b1017-cf1e-47af-0e69-bc8e3bc42ad4}">
+        <p14:section name="연습" id="{cbe813e8-b1be-20d9-a9cb-71bb0c785255}">
           <p14:sldIdLst/>
         </p14:section>
-        <p14:section name="확인" id="{db670430-b7f4-18ea-5605-5e1cdbaa68d9}">
+        <p14:section name="확인" id="{838a1daa-d4ad-7b02-0c62-0fa1f2418398}">
           <p14:sldIdLst>
             <p14:sldId id="265"/>
             <p14:sldId id="266"/>
           </p14:sldIdLst>
         </p14:section>
-        <p14:section name="정리" id="{25361370-a52b-8471-ce58-cae1b53c4aa7}">
+        <p14:section name="정리" id="{03129355-cd4b-bc59-279a-d8a8631f2b5f}">
           <p14:sldIdLst>
             <p14:sldId id="267"/>
           </p14:sldIdLst>
         </p14:section>
-        <p14:section name="보충" id="{abba0107-49d7-a348-64ce-64e29f712845}">
+        <p14:section name="보충" id="{1c73692e-8cc1-dfc4-fcaa-862b27920a83}">
           <p14:sldIdLst>
             <p14:sldId id="268"/>
           </p14:sldIdLst>
@@ -7417,8 +7417,8 @@
         </p:nvSpPr>
         <p:spPr>
           <a:xfrm>
-            <a:off x="9250639" y="3237797"/>
-            <a:ext cx="562356" cy="349250"/>
+            <a:off x="9155643" y="3237797"/>
+            <a:ext cx="752348" cy="349250"/>
           </a:xfrm>
           <a:prstGeom prst="rect">
             <a:avLst/>
@@ -7914,8 +7914,8 @@
         </p:nvSpPr>
         <p:spPr>
           <a:xfrm>
-            <a:off x="9250639" y="4862195"/>
-            <a:ext cx="562356" cy="349250"/>
+            <a:off x="9155643" y="4862195"/>
+            <a:ext cx="752348" cy="349250"/>
           </a:xfrm>
           <a:prstGeom prst="rect">
             <a:avLst/>
@@ -11429,8 +11429,8 @@
         </p:nvSpPr>
         <p:spPr>
           <a:xfrm>
-            <a:off x="10636758" y="4410837"/>
-            <a:ext cx="562356" cy="349250"/>
+            <a:off x="10541762" y="4410837"/>
+            <a:ext cx="752348" cy="349250"/>
           </a:xfrm>
           <a:prstGeom prst="rect">
             <a:avLst/>
@@ -14934,8 +14934,8 @@
         </p:nvSpPr>
         <p:spPr>
           <a:xfrm>
-            <a:off x="10286416" y="4100195"/>
-            <a:ext cx="562356" cy="349250"/>
+            <a:off x="10191420" y="4100195"/>
+            <a:ext cx="752348" cy="349250"/>
           </a:xfrm>
           <a:prstGeom prst="rect">
             <a:avLst/>
@@ -16688,8 +16688,8 @@
         </p:nvSpPr>
         <p:spPr>
           <a:xfrm>
-            <a:off x="9667061" y="3112643"/>
-            <a:ext cx="562356" cy="349250"/>
+            <a:off x="9572065" y="3112643"/>
+            <a:ext cx="752348" cy="349250"/>
           </a:xfrm>
           <a:prstGeom prst="rect">
             <a:avLst/>
